--- a/docs/VELO-PITCH-EN-ES.pptx
+++ b/docs/VELO-PITCH-EN-ES.pptx
@@ -4070,6 +4070,10 @@
             </a:outerShdw>
           </a:effectLst>
         </p:spPr>
+        <p:txBody>
+          <a:bodyPr/>
+          <a:p/>
+        </p:txBody>
       </p:sp>
       <p:sp>
         <p:nvSpPr>
@@ -4570,6 +4574,10 @@
             </a:outerShdw>
           </a:effectLst>
         </p:spPr>
+        <p:txBody>
+          <a:bodyPr/>
+          <a:p/>
+        </p:txBody>
       </p:sp>
       <p:sp>
         <p:nvSpPr>
@@ -5254,6 +5262,10 @@
             </a:outerShdw>
           </a:effectLst>
         </p:spPr>
+        <p:txBody>
+          <a:bodyPr/>
+          <a:p/>
+        </p:txBody>
       </p:sp>
       <p:sp>
         <p:nvSpPr>
@@ -5531,6 +5543,10 @@
             </a:outerShdw>
           </a:effectLst>
         </p:spPr>
+        <p:txBody>
+          <a:bodyPr/>
+          <a:p/>
+        </p:txBody>
       </p:sp>
       <p:sp>
         <p:nvSpPr>
@@ -5801,6 +5817,10 @@
             <a:prstDash val="solid"/>
           </a:ln>
         </p:spPr>
+        <p:txBody>
+          <a:bodyPr/>
+          <a:p/>
+        </p:txBody>
       </p:sp>
       <p:sp>
         <p:nvSpPr>
@@ -6215,6 +6235,10 @@
             </a:outerShdw>
           </a:effectLst>
         </p:spPr>
+        <p:txBody>
+          <a:bodyPr/>
+          <a:p/>
+        </p:txBody>
       </p:sp>
       <p:sp>
         <p:nvSpPr>
@@ -6447,6 +6471,10 @@
             </a:outerShdw>
           </a:effectLst>
         </p:spPr>
+        <p:txBody>
+          <a:bodyPr/>
+          <a:p/>
+        </p:txBody>
       </p:sp>
       <p:sp>
         <p:nvSpPr>
@@ -6667,6 +6695,10 @@
             <a:prstDash val="solid"/>
           </a:ln>
         </p:spPr>
+        <p:txBody>
+          <a:bodyPr/>
+          <a:p/>
+        </p:txBody>
       </p:sp>
       <p:sp>
         <p:nvSpPr>
@@ -7042,6 +7074,10 @@
             </a:outerShdw>
           </a:effectLst>
         </p:spPr>
+        <p:txBody>
+          <a:bodyPr/>
+          <a:p/>
+        </p:txBody>
       </p:sp>
       <p:sp>
         <p:nvSpPr>
@@ -7274,6 +7310,10 @@
             </a:outerShdw>
           </a:effectLst>
         </p:spPr>
+        <p:txBody>
+          <a:bodyPr/>
+          <a:p/>
+        </p:txBody>
       </p:sp>
       <p:sp>
         <p:nvSpPr>
@@ -7454,6 +7494,10 @@
             <a:tailEnd type="triangle"/>
           </a:ln>
         </p:spPr>
+        <p:txBody>
+          <a:bodyPr/>
+          <a:p/>
+        </p:txBody>
       </p:sp>
       <p:sp>
         <p:nvSpPr>
@@ -7488,7 +7532,7 @@
                 <a:ea typeface="Courier New" pitchFamily="34" charset="-122"/>
                 <a:cs typeface="Courier New" pitchFamily="34" charset="-120"/>
               </a:rPr>
-              <a:t>persistentHash(bundle_fingerprint, salt)</a:t>
+              <a:t>persistentHash(domain, bundle_fingerprint, custody_tip, verdict, corroboration_count, salt)</a:t>
             </a:r>
             <a:endParaRPr lang="en-US" sz="1300" dirty="0"/>
           </a:p>
@@ -7939,6 +7983,10 @@
             <a:prstDash val="solid"/>
           </a:ln>
         </p:spPr>
+        <p:txBody>
+          <a:bodyPr/>
+          <a:p/>
+        </p:txBody>
       </p:sp>
       <p:sp>
         <p:nvSpPr>
@@ -8041,7 +8089,7 @@
                 <a:ea typeface="Calibri" pitchFamily="34" charset="-122"/>
                 <a:cs typeface="Calibri" pitchFamily="34" charset="-120"/>
               </a:rPr>
-              <a:t>This is what stops a portfolio from being inflated. An attempt to seal MALICE from a single source does not fail validation — it fails to produce a proof at all.</a:t>
+              <a:t>This is what stops a portfolio from being inflated. An attempt to seal MALICE from a single source does not fail validation — it fails to produce a proof at all. The circuit enforces the count; sources are counted distinct by declared provenance root, not proven independent.</a:t>
             </a:r>
             <a:endParaRPr lang="en-US" sz="1100" dirty="0"/>
           </a:p>
@@ -8083,7 +8131,7 @@
                 <a:ea typeface="Calibri" pitchFamily="34" charset="-122"/>
                 <a:cs typeface="Calibri" pitchFamily="34" charset="-120"/>
               </a:rPr>
-              <a:t>Esto es lo que impide inflar un portafolio. Un intento de sellar MALICE con una sola fuente no falla la validación — directamente no produce una prueba.</a:t>
+              <a:t>Esto es lo que impide inflar un portafolio. Un intento de sellar MALICE con una sola fuente no falla la validación — directamente no produce una prueba. El circuito impone el conteo; las fuentes se cuentan distintas por raíz de proveniencia declarada, no probada independiente.</a:t>
             </a:r>
             <a:endParaRPr lang="en-US" sz="1100" dirty="0"/>
           </a:p>
@@ -8444,6 +8492,10 @@
             </a:outerShdw>
           </a:effectLst>
         </p:spPr>
+        <p:txBody>
+          <a:bodyPr/>
+          <a:p/>
+        </p:txBody>
       </p:sp>
       <p:sp>
         <p:nvSpPr>
@@ -8541,6 +8593,10 @@
             </a:outerShdw>
           </a:effectLst>
         </p:spPr>
+        <p:txBody>
+          <a:bodyPr/>
+          <a:p/>
+        </p:txBody>
       </p:sp>
       <p:sp>
         <p:nvSpPr>
@@ -8660,6 +8716,10 @@
             <a:tailEnd type="triangle"/>
           </a:ln>
         </p:spPr>
+        <p:txBody>
+          <a:bodyPr/>
+          <a:p/>
+        </p:txBody>
       </p:sp>
       <p:sp>
         <p:nvSpPr>
@@ -8692,6 +8752,10 @@
             </a:outerShdw>
           </a:effectLst>
         </p:spPr>
+        <p:txBody>
+          <a:bodyPr/>
+          <a:p/>
+        </p:txBody>
       </p:sp>
       <p:sp>
         <p:nvSpPr>
@@ -8811,6 +8875,10 @@
             <a:tailEnd type="triangle"/>
           </a:ln>
         </p:spPr>
+        <p:txBody>
+          <a:bodyPr/>
+          <a:p/>
+        </p:txBody>
       </p:sp>
       <p:sp>
         <p:nvSpPr>
@@ -8843,6 +8911,10 @@
             </a:outerShdw>
           </a:effectLst>
         </p:spPr>
+        <p:txBody>
+          <a:bodyPr/>
+          <a:p/>
+        </p:txBody>
       </p:sp>
       <p:sp>
         <p:nvSpPr>
@@ -8972,7 +9044,7 @@
                 <a:ea typeface="Courier New" pitchFamily="34" charset="-122"/>
                 <a:cs typeface="Courier New" pitchFamily="34" charset="-120"/>
               </a:rPr>
-              <a:t>THE PROOF ESTABLISHES</a:t>
+              <a:t>THE PROOF ESTABLISHES   ·   LA PRUEBA ESTABLECERÁ · DISEÑADO, AÚN NO CONSTRUIDO</a:t>
             </a:r>
             <a:pPr indent="0" marL="0">
               <a:buNone/>
@@ -8986,7 +9058,7 @@
                 <a:ea typeface="Courier New" pitchFamily="34" charset="-122"/>
                 <a:cs typeface="Courier New" pitchFamily="34" charset="-120"/>
               </a:rPr>
-              <a:t>   ·   </a:t>
+              <a:t/>
             </a:r>
             <a:pPr indent="0" marL="0">
               <a:buNone/>
@@ -9000,7 +9072,7 @@
                 <a:ea typeface="Courier New" pitchFamily="34" charset="-122"/>
                 <a:cs typeface="Courier New" pitchFamily="34" charset="-120"/>
               </a:rPr>
-              <a:t>LA PRUEBA ESTABLECE</a:t>
+              <a:t/>
             </a:r>
             <a:endParaRPr lang="en-US" sz="850" dirty="0"/>
           </a:p>
@@ -9499,7 +9571,7 @@
                 <a:ea typeface="Century Schoolbook" pitchFamily="34" charset="-122"/>
                 <a:cs typeface="Century Schoolbook" pitchFamily="34" charset="-120"/>
               </a:rPr>
-              <a:t>VELO proves a sealed case was not altered afterwards, that the admissibility rule was satisfied, and that an accredited expert signed it.</a:t>
+              <a:t>VELO proves a sealed case was not altered afterwards and that the admissibility rule was satisfied. Binding it to an accredited expert is designed and specified — the credential circuit is not built yet, and we do not claim it is.</a:t>
             </a:r>
             <a:endParaRPr lang="en-US" sz="2500" dirty="0"/>
           </a:p>
@@ -9519,7 +9591,7 @@
                 <a:ea typeface="Century Schoolbook" pitchFamily="34" charset="-122"/>
                 <a:cs typeface="Century Schoolbook" pitchFamily="34" charset="-120"/>
               </a:rPr>
-              <a:t>VELO prueba que un caso sellado no fue alterado después, que la regla de admisibilidad se cumplió, y que lo firmó un perito acreditado.</a:t>
+              <a:t>VELO prueba que un caso sellado no fue alterado después y que la regla de admisibilidad se cumplió. Ligarlo a un perito acreditado está diseñado y especificado — el circuito de credencial todavía no está construido, y no afirmamos que lo esté.</a:t>
             </a:r>
             <a:endParaRPr lang="en-US" sz="2500" dirty="0"/>
           </a:p>
@@ -9549,6 +9621,10 @@
             <a:prstDash val="solid"/>
           </a:ln>
         </p:spPr>
+        <p:txBody>
+          <a:bodyPr/>
+          <a:p/>
+        </p:txBody>
       </p:sp>
       <p:sp>
         <p:nvSpPr>
@@ -9989,6 +10065,10 @@
             </a:outerShdw>
           </a:effectLst>
         </p:spPr>
+        <p:txBody>
+          <a:bodyPr/>
+          <a:p/>
+        </p:txBody>
       </p:sp>
       <p:sp>
         <p:nvSpPr>
@@ -10237,7 +10317,7 @@
                 <a:ea typeface="Calibri" pitchFamily="34" charset="-122"/>
                 <a:cs typeface="Calibri" pitchFamily="34" charset="-120"/>
               </a:rPr>
-              <a:t>Credential and admissibility gate on-chain</a:t>
+              <a:t>Admissibility gate enforced inside the compiled circuit</a:t>
             </a:r>
             <a:endParaRPr lang="en-US" sz="1200" dirty="0"/>
           </a:p>
@@ -10257,7 +10337,7 @@
                 <a:ea typeface="Calibri" pitchFamily="34" charset="-122"/>
                 <a:cs typeface="Calibri" pitchFamily="34" charset="-120"/>
               </a:rPr>
-              <a:t>Credencial y gate de admisibilidad on-chain</a:t>
+              <a:t>Gate de admisibilidad impuesto dentro del circuito compilado</a:t>
             </a:r>
             <a:endParaRPr lang="en-US" sz="1200" dirty="0"/>
           </a:p>
@@ -10359,6 +10439,10 @@
             </a:outerShdw>
           </a:effectLst>
         </p:spPr>
+        <p:txBody>
+          <a:bodyPr/>
+          <a:p/>
+        </p:txBody>
       </p:sp>
       <p:sp>
         <p:nvSpPr>
@@ -10477,7 +10561,7 @@
                 <a:ea typeface="Calibri" pitchFamily="34" charset="-122"/>
                 <a:cs typeface="Calibri" pitchFamily="34" charset="-120"/>
               </a:rPr>
-              <a:t>Marketplace queries over portfolios</a:t>
+              <a:t>Deploy to testnet, and the anonymous expert credential</a:t>
             </a:r>
             <a:endParaRPr lang="en-US" sz="1200" dirty="0"/>
           </a:p>
@@ -10497,7 +10581,7 @@
                 <a:ea typeface="Calibri" pitchFamily="34" charset="-122"/>
                 <a:cs typeface="Calibri" pitchFamily="34" charset="-120"/>
               </a:rPr>
-              <a:t>Consultas de marketplace sobre portafolios</a:t>
+              <a:t>Deploy a testnet, y la credencial anónima del perito</a:t>
             </a:r>
             <a:endParaRPr lang="en-US" sz="1200" dirty="0"/>
           </a:p>
@@ -10664,6 +10748,10 @@
             </a:outerShdw>
           </a:effectLst>
         </p:spPr>
+        <p:txBody>
+          <a:bodyPr/>
+          <a:p/>
+        </p:txBody>
       </p:sp>
       <p:sp>
         <p:nvSpPr>
@@ -11236,6 +11324,10 @@
             <a:prstDash val="solid"/>
           </a:ln>
         </p:spPr>
+        <p:txBody>
+          <a:bodyPr/>
+          <a:p/>
+        </p:txBody>
       </p:sp>
       <p:sp>
         <p:nvSpPr>
@@ -11365,6 +11457,10 @@
             <a:prstDash val="solid"/>
           </a:ln>
         </p:spPr>
+        <p:txBody>
+          <a:bodyPr/>
+          <a:p/>
+        </p:txBody>
       </p:sp>
       <p:sp>
         <p:nvSpPr>
@@ -11494,6 +11590,10 @@
             <a:prstDash val="solid"/>
           </a:ln>
         </p:spPr>
+        <p:txBody>
+          <a:bodyPr/>
+          <a:p/>
+        </p:txBody>
       </p:sp>
       <p:sp>
         <p:nvSpPr>
@@ -11623,6 +11723,10 @@
             <a:prstDash val="solid"/>
           </a:ln>
         </p:spPr>
+        <p:txBody>
+          <a:bodyPr/>
+          <a:p/>
+        </p:txBody>
       </p:sp>
       <p:sp>
         <p:nvSpPr>
@@ -12878,6 +12982,10 @@
             </a:outerShdw>
           </a:effectLst>
         </p:spPr>
+        <p:txBody>
+          <a:bodyPr/>
+          <a:p/>
+        </p:txBody>
       </p:sp>
       <p:sp>
         <p:nvSpPr>
@@ -13318,6 +13426,10 @@
             </a:outerShdw>
           </a:effectLst>
         </p:spPr>
+        <p:txBody>
+          <a:bodyPr/>
+          <a:p/>
+        </p:txBody>
       </p:sp>
       <p:sp>
         <p:nvSpPr>
@@ -13420,7 +13532,7 @@
                 <a:ea typeface="Calibri" pitchFamily="34" charset="-122"/>
                 <a:cs typeface="Calibri" pitchFamily="34" charset="-120"/>
               </a:rPr>
-              <a:t>Nothing in the wallet is self-reported. Every count is derived from on-chain attestations, and a MALICE outcome cannot be attested at all without two independent corroborating sources — the circuit refuses to produce the proof.</a:t>
+              <a:t>Nothing in the wallet is self-reported by design: every count derives from on-chain attestations once deployed. The rule itself is already enforced — a MALICE outcome cannot be attested without two corroborating sources, because the compiled circuit refuses to produce the proof.</a:t>
             </a:r>
             <a:endParaRPr lang="en-US" sz="1500" dirty="0"/>
           </a:p>
@@ -13462,7 +13574,7 @@
                 <a:ea typeface="Calibri" pitchFamily="34" charset="-122"/>
                 <a:cs typeface="Calibri" pitchFamily="34" charset="-120"/>
               </a:rPr>
-              <a:t>Nada en la wallet es autodeclarado. Cada conteo se deriva de atestaciones on-chain, y un resultado MALICE no se puede atestar sin dos fuentes de corroboración independientes — el circuito se niega a producir la prueba.</a:t>
+              <a:t>Nada en la wallet es autodeclarado por diseño: cada conteo se deriva de atestaciones on-chain una vez desplegado. La regla ya está impuesta — un resultado MALICE no se puede atestar sin dos fuentes de corroboración, porque el circuito compilado se niega a producir la prueba.</a:t>
             </a:r>
             <a:endParaRPr lang="en-US" sz="1500" dirty="0"/>
           </a:p>
@@ -13758,6 +13870,10 @@
             </a:outerShdw>
           </a:effectLst>
         </p:spPr>
+        <p:txBody>
+          <a:bodyPr/>
+          <a:p/>
+        </p:txBody>
       </p:sp>
       <p:sp>
         <p:nvSpPr>
@@ -14198,6 +14314,10 @@
             </a:outerShdw>
           </a:effectLst>
         </p:spPr>
+        <p:txBody>
+          <a:bodyPr/>
+          <a:p/>
+        </p:txBody>
       </p:sp>
       <p:sp>
         <p:nvSpPr>
@@ -14638,6 +14758,10 @@
             </a:outerShdw>
           </a:effectLst>
         </p:spPr>
+        <p:txBody>
+          <a:bodyPr/>
+          <a:p/>
+        </p:txBody>
       </p:sp>
       <p:sp>
         <p:nvSpPr>
@@ -15078,6 +15202,10 @@
             </a:outerShdw>
           </a:effectLst>
         </p:spPr>
+        <p:txBody>
+          <a:bodyPr/>
+          <a:p/>
+        </p:txBody>
       </p:sp>
       <p:sp>
         <p:nvSpPr>
@@ -15180,7 +15308,7 @@
                 <a:ea typeface="Calibri" pitchFamily="34" charset="-122"/>
                 <a:cs typeface="Calibri" pitchFamily="34" charset="-120"/>
               </a:rPr>
-              <a:t>The system proves what was sealed was not altered afterwards, that corroboration was satisfied mathematically, and that an accredited expert signed it. It does not prove the original analysis was honest.</a:t>
+              <a:t>The system proves what was sealed was not altered afterwards and that corroboration was satisfied mathematically. Binding it to an accredited expert is designed, not yet built. It does not prove the original analysis was honest.</a:t>
             </a:r>
             <a:endParaRPr lang="en-US" sz="1500" dirty="0"/>
           </a:p>
@@ -15222,7 +15350,7 @@
                 <a:ea typeface="Calibri" pitchFamily="34" charset="-122"/>
                 <a:cs typeface="Calibri" pitchFamily="34" charset="-120"/>
               </a:rPr>
-              <a:t>El sistema prueba que lo sellado no fue alterado después, que la corroboración se cumplió matemáticamente, y que lo firmó un perito acreditado. No prueba que el análisis original haya sido honesto.</a:t>
+              <a:t>El sistema prueba que lo sellado no fue alterado después y que la corroboración se cumplió matemáticamente. Ligarlo a un perito acreditado está diseñado, todavía no construido. No prueba que el análisis original haya sido honesto.</a:t>
             </a:r>
             <a:endParaRPr lang="en-US" sz="1500" dirty="0"/>
           </a:p>
@@ -15518,6 +15646,10 @@
             </a:outerShdw>
           </a:effectLst>
         </p:spPr>
+        <p:txBody>
+          <a:bodyPr/>
+          <a:p/>
+        </p:txBody>
       </p:sp>
       <p:sp>
         <p:nvSpPr>
@@ -15958,6 +16090,10 @@
             </a:outerShdw>
           </a:effectLst>
         </p:spPr>
+        <p:txBody>
+          <a:bodyPr/>
+          <a:p/>
+        </p:txBody>
       </p:sp>
       <p:sp>
         <p:nvSpPr>
@@ -16398,6 +16534,10 @@
             </a:outerShdw>
           </a:effectLst>
         </p:spPr>
+        <p:txBody>
+          <a:bodyPr/>
+          <a:p/>
+        </p:txBody>
       </p:sp>
       <p:sp>
         <p:nvSpPr>
@@ -16903,6 +17043,10 @@
             </a:outerShdw>
           </a:effectLst>
         </p:spPr>
+        <p:txBody>
+          <a:bodyPr/>
+          <a:p/>
+        </p:txBody>
       </p:sp>
       <p:sp>
         <p:nvSpPr>
@@ -17000,6 +17144,10 @@
             </a:outerShdw>
           </a:effectLst>
         </p:spPr>
+        <p:txBody>
+          <a:bodyPr/>
+          <a:p/>
+        </p:txBody>
       </p:sp>
       <p:sp>
         <p:nvSpPr>
@@ -17175,6 +17323,10 @@
             </a:outerShdw>
           </a:effectLst>
         </p:spPr>
+        <p:txBody>
+          <a:bodyPr/>
+          <a:p/>
+        </p:txBody>
       </p:sp>
       <p:sp>
         <p:nvSpPr>
@@ -17350,6 +17502,10 @@
             </a:outerShdw>
           </a:effectLst>
         </p:spPr>
+        <p:txBody>
+          <a:bodyPr/>
+          <a:p/>
+        </p:txBody>
       </p:sp>
       <p:sp>
         <p:nvSpPr>
@@ -17525,6 +17681,10 @@
             </a:outerShdw>
           </a:effectLst>
         </p:spPr>
+        <p:txBody>
+          <a:bodyPr/>
+          <a:p/>
+        </p:txBody>
       </p:sp>
       <p:sp>
         <p:nvSpPr>
@@ -17959,6 +18119,10 @@
             </a:outerShdw>
           </a:effectLst>
         </p:spPr>
+        <p:txBody>
+          <a:bodyPr/>
+          <a:p/>
+        </p:txBody>
       </p:sp>
       <p:sp>
         <p:nvSpPr>
@@ -18992,6 +19156,10 @@
             </a:outerShdw>
           </a:effectLst>
         </p:spPr>
+        <p:txBody>
+          <a:bodyPr/>
+          <a:p/>
+        </p:txBody>
       </p:sp>
       <p:sp>
         <p:nvSpPr>
@@ -19348,6 +19516,10 @@
             </a:outerShdw>
           </a:effectLst>
         </p:spPr>
+        <p:txBody>
+          <a:bodyPr/>
+          <a:p/>
+        </p:txBody>
       </p:sp>
       <p:sp>
         <p:nvSpPr>
@@ -19528,6 +19700,10 @@
             <a:tailEnd type="triangle"/>
           </a:ln>
         </p:spPr>
+        <p:txBody>
+          <a:bodyPr/>
+          <a:p/>
+        </p:txBody>
       </p:sp>
       <p:sp>
         <p:nvSpPr>
@@ -19560,6 +19736,10 @@
             </a:outerShdw>
           </a:effectLst>
         </p:spPr>
+        <p:txBody>
+          <a:bodyPr/>
+          <a:p/>
+        </p:txBody>
       </p:sp>
       <p:sp>
         <p:nvSpPr>
@@ -19672,7 +19852,7 @@
                 <a:ea typeface="Courier New" pitchFamily="34" charset="-122"/>
                 <a:cs typeface="Courier New" pitchFamily="34" charset="-120"/>
               </a:rPr>
-              <a:t>ZK · valid</a:t>
+              <a:t>ZK · roadmap</a:t>
             </a:r>
             <a:endParaRPr lang="en-US" sz="1600" dirty="0"/>
           </a:p>
@@ -19709,6 +19889,10 @@
             </a:outerShdw>
           </a:effectLst>
         </p:spPr>
+        <p:txBody>
+          <a:bodyPr/>
+          <a:p/>
+        </p:txBody>
       </p:sp>
       <p:sp>
         <p:nvSpPr>
@@ -19850,6 +20034,10 @@
             <a:tailEnd type="triangle"/>
           </a:ln>
         </p:spPr>
+        <p:txBody>
+          <a:bodyPr/>
+          <a:p/>
+        </p:txBody>
       </p:sp>
       <p:sp>
         <p:nvSpPr>
@@ -19882,6 +20070,10 @@
             </a:outerShdw>
           </a:effectLst>
         </p:spPr>
+        <p:txBody>
+          <a:bodyPr/>
+          <a:p/>
+        </p:txBody>
       </p:sp>
       <p:sp>
         <p:nvSpPr>
@@ -20196,6 +20388,10 @@
             </a:outerShdw>
           </a:effectLst>
         </p:spPr>
+        <p:txBody>
+          <a:bodyPr/>
+          <a:p/>
+        </p:txBody>
       </p:sp>
       <p:sp>
         <p:nvSpPr>
@@ -20880,6 +21076,10 @@
             </a:outerShdw>
           </a:effectLst>
         </p:spPr>
+        <p:txBody>
+          <a:bodyPr/>
+          <a:p/>
+        </p:txBody>
       </p:sp>
       <p:sp>
         <p:nvSpPr>
@@ -20977,6 +21177,10 @@
             </a:outerShdw>
           </a:effectLst>
         </p:spPr>
+        <p:txBody>
+          <a:bodyPr/>
+          <a:p/>
+        </p:txBody>
       </p:sp>
       <p:sp>
         <p:nvSpPr>
@@ -21152,6 +21356,10 @@
             </a:outerShdw>
           </a:effectLst>
         </p:spPr>
+        <p:txBody>
+          <a:bodyPr/>
+          <a:p/>
+        </p:txBody>
       </p:sp>
       <p:sp>
         <p:nvSpPr>
@@ -21586,6 +21794,10 @@
             </a:outerShdw>
           </a:effectLst>
         </p:spPr>
+        <p:txBody>
+          <a:bodyPr/>
+          <a:p/>
+        </p:txBody>
       </p:sp>
       <p:sp>
         <p:nvSpPr>
@@ -21683,6 +21895,10 @@
             </a:outerShdw>
           </a:effectLst>
         </p:spPr>
+        <p:txBody>
+          <a:bodyPr/>
+          <a:p/>
+        </p:txBody>
       </p:sp>
       <p:sp>
         <p:nvSpPr>
@@ -21869,6 +22085,10 @@
             <a:tailEnd type="triangle"/>
           </a:ln>
         </p:spPr>
+        <p:txBody>
+          <a:bodyPr/>
+          <a:p/>
+        </p:txBody>
       </p:sp>
       <p:sp>
         <p:nvSpPr>
@@ -22264,6 +22484,10 @@
             </a:outerShdw>
           </a:effectLst>
         </p:spPr>
+        <p:txBody>
+          <a:bodyPr/>
+          <a:p/>
+        </p:txBody>
       </p:sp>
       <p:sp>
         <p:nvSpPr>
@@ -22298,7 +22522,7 @@
                 <a:ea typeface="Courier New" pitchFamily="34" charset="-122"/>
                 <a:cs typeface="Courier New" pitchFamily="34" charset="-120"/>
               </a:rPr>
-              <a:t>DAY 0 · THE ANALYSIS, VELO RECORDS</a:t>
+              <a:t>DAY 0 · THE ANALYSIS, VELO RECORDS (DESIGN)</a:t>
             </a:r>
             <a:endParaRPr lang="en-US" sz="850" dirty="0"/>
           </a:p>
@@ -22337,7 +22561,7 @@
                 <a:ea typeface="Courier New" pitchFamily="34" charset="-122"/>
                 <a:cs typeface="Courier New" pitchFamily="34" charset="-120"/>
               </a:rPr>
-              <a:t>DÍA 0 · EL ANÁLISIS, VELO REGISTRA</a:t>
+              <a:t>DÍA 0 · EL ANÁLISIS, VELO REGISTRA (DISEÑO)</a:t>
             </a:r>
             <a:endParaRPr lang="en-US" sz="850" dirty="0"/>
           </a:p>
@@ -22431,6 +22655,10 @@
             <a:tailEnd type="triangle"/>
           </a:ln>
         </p:spPr>
+        <p:txBody>
+          <a:bodyPr/>
+          <a:p/>
+        </p:txBody>
       </p:sp>
       <p:sp>
         <p:nvSpPr>
@@ -22463,6 +22691,10 @@
             </a:outerShdw>
           </a:effectLst>
         </p:spPr>
+        <p:txBody>
+          <a:bodyPr/>
+          <a:p/>
+        </p:txBody>
       </p:sp>
       <p:sp>
         <p:nvSpPr>
@@ -22638,6 +22870,10 @@
             </a:outerShdw>
           </a:effectLst>
         </p:spPr>
+        <p:txBody>
+          <a:bodyPr/>
+          <a:p/>
+        </p:txBody>
       </p:sp>
       <p:sp>
         <p:nvSpPr>

--- a/docs/VELO-PITCH-EN-ES.pptx
+++ b/docs/VELO-PITCH-EN-ES.pptx
@@ -3507,7 +3507,7 @@
                 <a:ea typeface="Courier New" pitchFamily="34" charset="-122"/>
                 <a:cs typeface="Courier New" pitchFamily="34" charset="-120"/>
               </a:rPr>
-              <a:t>MIDNIGHT NETWORK · HACKATHON · 2026</a:t>
+              <a:t>MIDNIGHT NETWORK · 2026</a:t>
             </a:r>
             <a:endParaRPr lang="en-US" sz="1000" dirty="0"/>
           </a:p>
